--- a/신뢰구간 임용고시 2014.pptx
+++ b/신뢰구간 임용고시 2014.pptx
@@ -11,11 +11,11 @@
     <p:sldId id="267" r:id="rId5"/>
     <p:sldId id="270" r:id="rId6"/>
     <p:sldId id="271" r:id="rId7"/>
-    <p:sldId id="268" r:id="rId8"/>
-    <p:sldId id="272" r:id="rId9"/>
-    <p:sldId id="273" r:id="rId10"/>
-    <p:sldId id="274" r:id="rId11"/>
-    <p:sldId id="275" r:id="rId12"/>
+    <p:sldId id="275" r:id="rId8"/>
+    <p:sldId id="276" r:id="rId9"/>
+    <p:sldId id="277" r:id="rId10"/>
+    <p:sldId id="278" r:id="rId11"/>
+    <p:sldId id="279" r:id="rId12"/>
   </p:sldIdLst>
   <p:sldSz cx="12192000" cy="6858000"/>
   <p:notesSz cx="6858000" cy="9144000"/>
@@ -253,7 +253,7 @@
           <a:p>
             <a:fld id="{5B3AD1D6-AE87-C841-B3FD-7C9F7FCAE5AE}" type="datetimeFigureOut">
               <a:rPr lang="en-US" smtClean="0"/>
-              <a:t>12/15/19</a:t>
+              <a:t>12/17/19</a:t>
             </a:fld>
             <a:endParaRPr lang="en-US"/>
           </a:p>
@@ -423,7 +423,7 @@
           <a:p>
             <a:fld id="{5B3AD1D6-AE87-C841-B3FD-7C9F7FCAE5AE}" type="datetimeFigureOut">
               <a:rPr lang="en-US" smtClean="0"/>
-              <a:t>12/15/19</a:t>
+              <a:t>12/17/19</a:t>
             </a:fld>
             <a:endParaRPr lang="en-US"/>
           </a:p>
@@ -603,7 +603,7 @@
           <a:p>
             <a:fld id="{5B3AD1D6-AE87-C841-B3FD-7C9F7FCAE5AE}" type="datetimeFigureOut">
               <a:rPr lang="en-US" smtClean="0"/>
-              <a:t>12/15/19</a:t>
+              <a:t>12/17/19</a:t>
             </a:fld>
             <a:endParaRPr lang="en-US"/>
           </a:p>
@@ -773,7 +773,7 @@
           <a:p>
             <a:fld id="{5B3AD1D6-AE87-C841-B3FD-7C9F7FCAE5AE}" type="datetimeFigureOut">
               <a:rPr lang="en-US" smtClean="0"/>
-              <a:t>12/15/19</a:t>
+              <a:t>12/17/19</a:t>
             </a:fld>
             <a:endParaRPr lang="en-US"/>
           </a:p>
@@ -1019,7 +1019,7 @@
           <a:p>
             <a:fld id="{5B3AD1D6-AE87-C841-B3FD-7C9F7FCAE5AE}" type="datetimeFigureOut">
               <a:rPr lang="en-US" smtClean="0"/>
-              <a:t>12/15/19</a:t>
+              <a:t>12/17/19</a:t>
             </a:fld>
             <a:endParaRPr lang="en-US"/>
           </a:p>
@@ -1251,7 +1251,7 @@
           <a:p>
             <a:fld id="{5B3AD1D6-AE87-C841-B3FD-7C9F7FCAE5AE}" type="datetimeFigureOut">
               <a:rPr lang="en-US" smtClean="0"/>
-              <a:t>12/15/19</a:t>
+              <a:t>12/17/19</a:t>
             </a:fld>
             <a:endParaRPr lang="en-US"/>
           </a:p>
@@ -1618,7 +1618,7 @@
           <a:p>
             <a:fld id="{5B3AD1D6-AE87-C841-B3FD-7C9F7FCAE5AE}" type="datetimeFigureOut">
               <a:rPr lang="en-US" smtClean="0"/>
-              <a:t>12/15/19</a:t>
+              <a:t>12/17/19</a:t>
             </a:fld>
             <a:endParaRPr lang="en-US"/>
           </a:p>
@@ -1736,7 +1736,7 @@
           <a:p>
             <a:fld id="{5B3AD1D6-AE87-C841-B3FD-7C9F7FCAE5AE}" type="datetimeFigureOut">
               <a:rPr lang="en-US" smtClean="0"/>
-              <a:t>12/15/19</a:t>
+              <a:t>12/17/19</a:t>
             </a:fld>
             <a:endParaRPr lang="en-US"/>
           </a:p>
@@ -1831,7 +1831,7 @@
           <a:p>
             <a:fld id="{5B3AD1D6-AE87-C841-B3FD-7C9F7FCAE5AE}" type="datetimeFigureOut">
               <a:rPr lang="en-US" smtClean="0"/>
-              <a:t>12/15/19</a:t>
+              <a:t>12/17/19</a:t>
             </a:fld>
             <a:endParaRPr lang="en-US"/>
           </a:p>
@@ -2108,7 +2108,7 @@
           <a:p>
             <a:fld id="{5B3AD1D6-AE87-C841-B3FD-7C9F7FCAE5AE}" type="datetimeFigureOut">
               <a:rPr lang="en-US" smtClean="0"/>
-              <a:t>12/15/19</a:t>
+              <a:t>12/17/19</a:t>
             </a:fld>
             <a:endParaRPr lang="en-US"/>
           </a:p>
@@ -2361,7 +2361,7 @@
           <a:p>
             <a:fld id="{5B3AD1D6-AE87-C841-B3FD-7C9F7FCAE5AE}" type="datetimeFigureOut">
               <a:rPr lang="en-US" smtClean="0"/>
-              <a:t>12/15/19</a:t>
+              <a:t>12/17/19</a:t>
             </a:fld>
             <a:endParaRPr lang="en-US"/>
           </a:p>
@@ -2574,7 +2574,7 @@
           <a:p>
             <a:fld id="{5B3AD1D6-AE87-C841-B3FD-7C9F7FCAE5AE}" type="datetimeFigureOut">
               <a:rPr lang="en-US" smtClean="0"/>
-              <a:t>12/15/19</a:t>
+              <a:t>12/17/19</a:t>
             </a:fld>
             <a:endParaRPr lang="en-US"/>
           </a:p>
@@ -3197,7 +3197,7 @@
               </a:rPr>
             </a:br>
             <a:r>
-              <a:rPr lang="en-US" sz="6700" dirty="0" smtClean="0">
+              <a:rPr lang="en-US" sz="6700" smtClean="0">
                 <a:latin typeface="Arial Black" charset="0"/>
                 <a:ea typeface="Arial Black" charset="0"/>
                 <a:cs typeface="Arial Black" charset="0"/>
@@ -3205,12 +3205,20 @@
               <a:t>Confidence Interval</a:t>
             </a:r>
             <a:br>
-              <a:rPr lang="en-US" sz="6700" dirty="0" smtClean="0">
+              <a:rPr lang="en-US" sz="6700" smtClean="0">
                 <a:latin typeface="Arial Black" charset="0"/>
                 <a:ea typeface="Arial Black" charset="0"/>
                 <a:cs typeface="Arial Black" charset="0"/>
               </a:rPr>
             </a:br>
+            <a:r>
+              <a:rPr lang="en-US" sz="6700" smtClean="0">
+                <a:latin typeface="Arial Black" charset="0"/>
+                <a:ea typeface="Arial Black" charset="0"/>
+                <a:cs typeface="Arial Black" charset="0"/>
+              </a:rPr>
+              <a:t>2014</a:t>
+            </a:r>
             <a:r>
               <a:rPr lang="en-US" sz="6700" dirty="0" smtClean="0">
                 <a:latin typeface="Arial Black" charset="0"/>
@@ -3342,8 +3350,8 @@
         </p:blipFill>
         <p:spPr>
           <a:xfrm>
-            <a:off x="915712" y="3108960"/>
-            <a:ext cx="11174250" cy="3159760"/>
+            <a:off x="1302843" y="3172460"/>
+            <a:ext cx="9568357" cy="3159760"/>
           </a:xfrm>
           <a:prstGeom prst="rect">
             <a:avLst/>
@@ -3372,8 +3380,8 @@
         </p:blipFill>
         <p:spPr>
           <a:xfrm>
-            <a:off x="4853940" y="826135"/>
-            <a:ext cx="3550920" cy="1627505"/>
+            <a:off x="3321282" y="1016000"/>
+            <a:ext cx="6363110" cy="1539239"/>
           </a:xfrm>
           <a:prstGeom prst="rect">
             <a:avLst/>
@@ -3402,8 +3410,8 @@
         </p:blipFill>
         <p:spPr>
           <a:xfrm>
-            <a:off x="1042275" y="5593080"/>
-            <a:ext cx="10921125" cy="675640"/>
+            <a:off x="598593" y="5588000"/>
+            <a:ext cx="10704407" cy="1003299"/>
           </a:xfrm>
           <a:prstGeom prst="rect">
             <a:avLst/>
@@ -3413,7 +3421,7 @@
     </p:spTree>
     <p:extLst>
       <p:ext uri="{BB962C8B-B14F-4D97-AF65-F5344CB8AC3E}">
-        <p14:creationId xmlns:p14="http://schemas.microsoft.com/office/powerpoint/2010/main" val="167366404"/>
+        <p14:creationId xmlns:p14="http://schemas.microsoft.com/office/powerpoint/2010/main" val="824648352"/>
       </p:ext>
     </p:extLst>
   </p:cSld>
@@ -3492,8 +3500,8 @@
         </p:blipFill>
         <p:spPr>
           <a:xfrm>
-            <a:off x="915712" y="3108960"/>
-            <a:ext cx="11174250" cy="3159760"/>
+            <a:off x="1302843" y="3172460"/>
+            <a:ext cx="9568357" cy="3159760"/>
           </a:xfrm>
           <a:prstGeom prst="rect">
             <a:avLst/>
@@ -3522,8 +3530,8 @@
         </p:blipFill>
         <p:spPr>
           <a:xfrm>
-            <a:off x="4853940" y="826135"/>
-            <a:ext cx="3550920" cy="1627505"/>
+            <a:off x="3321282" y="1016000"/>
+            <a:ext cx="6363110" cy="1539239"/>
           </a:xfrm>
           <a:prstGeom prst="rect">
             <a:avLst/>
@@ -3533,7 +3541,7 @@
     </p:spTree>
     <p:extLst>
       <p:ext uri="{BB962C8B-B14F-4D97-AF65-F5344CB8AC3E}">
-        <p14:creationId xmlns:p14="http://schemas.microsoft.com/office/powerpoint/2010/main" val="483751068"/>
+        <p14:creationId xmlns:p14="http://schemas.microsoft.com/office/powerpoint/2010/main" val="1772587184"/>
       </p:ext>
     </p:extLst>
   </p:cSld>
@@ -3745,15 +3753,7 @@
                 <a:ea typeface="Arial Black" charset="0"/>
                 <a:cs typeface="Arial Black" charset="0"/>
               </a:rPr>
-              <a:t>[</a:t>
-            </a:r>
-            <a:r>
-              <a:rPr lang="en-US" sz="4000" dirty="0" smtClean="0">
-                <a:latin typeface="Arial Black" charset="0"/>
-                <a:ea typeface="Arial Black" charset="0"/>
-                <a:cs typeface="Arial Black" charset="0"/>
-              </a:rPr>
-              <a:t>2014]</a:t>
+              <a:t>[2014]</a:t>
             </a:r>
             <a:endParaRPr lang="en-US" sz="4000" dirty="0">
               <a:latin typeface="Arial Black" charset="0"/>
@@ -4295,8 +4295,8 @@
         </p:blipFill>
         <p:spPr>
           <a:xfrm>
-            <a:off x="915712" y="3108960"/>
-            <a:ext cx="11174250" cy="3159760"/>
+            <a:off x="1302843" y="3172460"/>
+            <a:ext cx="9568357" cy="3159760"/>
           </a:xfrm>
           <a:prstGeom prst="rect">
             <a:avLst/>
@@ -4325,8 +4325,8 @@
         </p:blipFill>
         <p:spPr>
           <a:xfrm>
-            <a:off x="4853940" y="826135"/>
-            <a:ext cx="3550920" cy="1627505"/>
+            <a:off x="3321282" y="1016000"/>
+            <a:ext cx="6363110" cy="1539239"/>
           </a:xfrm>
           <a:prstGeom prst="rect">
             <a:avLst/>
@@ -4355,8 +4355,8 @@
         </p:blipFill>
         <p:spPr>
           <a:xfrm>
-            <a:off x="1042275" y="2946400"/>
-            <a:ext cx="10921125" cy="3322320"/>
+            <a:off x="598593" y="2895600"/>
+            <a:ext cx="10704407" cy="3695700"/>
           </a:xfrm>
           <a:prstGeom prst="rect">
             <a:avLst/>
@@ -4366,7 +4366,7 @@
     </p:spTree>
     <p:extLst>
       <p:ext uri="{BB962C8B-B14F-4D97-AF65-F5344CB8AC3E}">
-        <p14:creationId xmlns:p14="http://schemas.microsoft.com/office/powerpoint/2010/main" val="1939551855"/>
+        <p14:creationId xmlns:p14="http://schemas.microsoft.com/office/powerpoint/2010/main" val="483751068"/>
       </p:ext>
     </p:extLst>
   </p:cSld>
@@ -4445,8 +4445,8 @@
         </p:blipFill>
         <p:spPr>
           <a:xfrm>
-            <a:off x="915712" y="3108960"/>
-            <a:ext cx="11174250" cy="3159760"/>
+            <a:off x="1302843" y="3172460"/>
+            <a:ext cx="9568357" cy="3159760"/>
           </a:xfrm>
           <a:prstGeom prst="rect">
             <a:avLst/>
@@ -4475,8 +4475,8 @@
         </p:blipFill>
         <p:spPr>
           <a:xfrm>
-            <a:off x="4853940" y="826135"/>
-            <a:ext cx="3550920" cy="1627505"/>
+            <a:off x="3321282" y="1016000"/>
+            <a:ext cx="6363110" cy="1539239"/>
           </a:xfrm>
           <a:prstGeom prst="rect">
             <a:avLst/>
@@ -4505,8 +4505,8 @@
         </p:blipFill>
         <p:spPr>
           <a:xfrm>
-            <a:off x="1042275" y="3825240"/>
-            <a:ext cx="10921125" cy="2443480"/>
+            <a:off x="598593" y="3992878"/>
+            <a:ext cx="10704407" cy="2598421"/>
           </a:xfrm>
           <a:prstGeom prst="rect">
             <a:avLst/>
@@ -4516,7 +4516,7 @@
     </p:spTree>
     <p:extLst>
       <p:ext uri="{BB962C8B-B14F-4D97-AF65-F5344CB8AC3E}">
-        <p14:creationId xmlns:p14="http://schemas.microsoft.com/office/powerpoint/2010/main" val="333040834"/>
+        <p14:creationId xmlns:p14="http://schemas.microsoft.com/office/powerpoint/2010/main" val="1564731116"/>
       </p:ext>
     </p:extLst>
   </p:cSld>
@@ -4595,8 +4595,8 @@
         </p:blipFill>
         <p:spPr>
           <a:xfrm>
-            <a:off x="915712" y="3108960"/>
-            <a:ext cx="11174250" cy="3159760"/>
+            <a:off x="1302843" y="3172460"/>
+            <a:ext cx="9568357" cy="3159760"/>
           </a:xfrm>
           <a:prstGeom prst="rect">
             <a:avLst/>
@@ -4625,8 +4625,8 @@
         </p:blipFill>
         <p:spPr>
           <a:xfrm>
-            <a:off x="4853940" y="826135"/>
-            <a:ext cx="3550920" cy="1627505"/>
+            <a:off x="3321282" y="1016000"/>
+            <a:ext cx="6363110" cy="1539239"/>
           </a:xfrm>
           <a:prstGeom prst="rect">
             <a:avLst/>
@@ -4655,8 +4655,8 @@
         </p:blipFill>
         <p:spPr>
           <a:xfrm>
-            <a:off x="1042275" y="4663440"/>
-            <a:ext cx="10921125" cy="1605280"/>
+            <a:off x="598593" y="4813300"/>
+            <a:ext cx="10704407" cy="1777999"/>
           </a:xfrm>
           <a:prstGeom prst="rect">
             <a:avLst/>
@@ -4666,7 +4666,7 @@
     </p:spTree>
     <p:extLst>
       <p:ext uri="{BB962C8B-B14F-4D97-AF65-F5344CB8AC3E}">
-        <p14:creationId xmlns:p14="http://schemas.microsoft.com/office/powerpoint/2010/main" val="1395919582"/>
+        <p14:creationId xmlns:p14="http://schemas.microsoft.com/office/powerpoint/2010/main" val="1960865635"/>
       </p:ext>
     </p:extLst>
   </p:cSld>
